--- a/decks/hist-whitechapel/hist-whitechapel_ch3_the-five-women.pptx
+++ b/decks/hist-whitechapel/hist-whitechapel_ch3_the-five-women.pptx
@@ -127,30 +127,30 @@
   <p:extLst>
     <p:ext uri="{521415D9-36F7-43E2-AB2F-B90AF26B5E84}">
       <p14:sectionLst xmlns:p14="http://schemas.microsoft.com/office/powerpoint/2010/main">
-        <p14:section name="Opening" id="{002a148f-8ca9-501e-41a4-6c1e8049ad5b}">
+        <p14:section name="Opening" id="{345f2f95-5cb8-46f0-199c-b87bd829339b}">
           <p14:sldIdLst>
             <p14:sldId id="256"/>
           </p14:sldIdLst>
         </p14:section>
-        <p14:section name="Gate" id="{0c8d48c5-5997-ff8d-8d96-87da3a498aa5}">
+        <p14:section name="Gate" id="{33119b98-3991-d854-70b0-c4e674fe797b}">
           <p14:sldIdLst>
             <p14:sldId id="257"/>
             <p14:sldId id="258"/>
           </p14:sldIdLst>
         </p14:section>
-        <p14:section name="Pre-teach" id="{b08ddc24-c44c-8230-c382-830abfa5cdff}">
+        <p14:section name="Pre-teach" id="{2baa4b78-238f-1b36-15ec-93d3144aaed5}">
           <p14:sldIdLst>
             <p14:sldId id="259"/>
             <p14:sldId id="260"/>
           </p14:sldIdLst>
         </p14:section>
-        <p14:section name="Read-along" id="{fed23dc6-e41f-a69e-e956-779c5cc4f240}">
+        <p14:section name="Read-along" id="{0207eb2b-1984-1c1f-4a36-6539cf522ab4}">
           <p14:sldIdLst>
             <p14:sldId id="261"/>
             <p14:sldId id="262"/>
           </p14:sldIdLst>
         </p14:section>
-        <p14:section name="Teach" id="{e4ecdc62-db01-f13a-3160-0f7f824b2990}">
+        <p14:section name="Teach" id="{807443f5-e2d5-99c7-44ca-86461e9565b7}">
           <p14:sldIdLst>
             <p14:sldId id="263"/>
             <p14:sldId id="264"/>
@@ -159,7 +159,7 @@
             <p14:sldId id="267"/>
           </p14:sldIdLst>
         </p14:section>
-        <p14:section name="Routes" id="{85f49025-5b8c-af82-f19d-2324e4ed8a52}">
+        <p14:section name="Routes" id="{673efff3-4b29-3357-0cdd-ee67f26b5f0f}">
           <p14:sldIdLst>
             <p14:sldId id="268"/>
             <p14:sldId id="269"/>
@@ -167,12 +167,12 @@
             <p14:sldId id="271"/>
           </p14:sldIdLst>
         </p14:section>
-        <p14:section name="Close" id="{92b73d70-7d51-f282-7902-2b970f127489}">
+        <p14:section name="Close" id="{52f982c9-5f5f-611a-ab8b-ccd8bf5dffa2}">
           <p14:sldIdLst>
             <p14:sldId id="272"/>
           </p14:sldIdLst>
         </p14:section>
-        <p14:section name="Answers" id="{47c5af95-d1a4-83f5-8dd7-f7ee39d0e716}">
+        <p14:section name="Answers" id="{87fe7144-f27a-c4fc-c224-82255870c1b4}">
           <p14:sldIdLst>
             <p14:sldId id="273"/>
             <p14:sldId id="274"/>
